--- a/参赛材料/振动AI实验助手-汇报PPT-v3.pptx
+++ b/参赛材料/振动AI实验助手-汇报PPT-v3.pptx
@@ -10227,7 +10227,7 @@
                 <a:ea typeface="微软雅黑" pitchFamily="34" charset="-122"/>
                 <a:cs typeface="微软雅黑" pitchFamily="34" charset="-120"/>
               </a:rPr>
-              <a:t>团队 / 姓名 / 学校：待填写真实信息　·　代码仓库与演示网址：发布后填写</a:t>
+              <a:t>团队 / 姓名 / 学校：待填写真实信息　·　github.com/ahzszq/vibration-ai-assistant</a:t>
             </a:r>
             <a:endParaRPr lang="en-US" sz="950" dirty="0"/>
           </a:p>

--- a/参赛材料/振动AI实验助手-汇报PPT-v3.pptx
+++ b/参赛材料/振动AI实验助手-汇报PPT-v3.pptx
@@ -7742,7 +7742,7 @@
                 <a:ea typeface="微软雅黑" pitchFamily="34" charset="-122"/>
                 <a:cs typeface="微软雅黑" pitchFamily="34" charset="-120"/>
               </a:rPr>
-              <a:t>界面为 03_可运行Demo/振动AI实验助手-单文件v4.html 本机实际运行截图。</a:t>
+              <a:t>界面为 振动AI实验助手.html 本机实际运行截图。</a:t>
             </a:r>
             <a:endParaRPr lang="en-US" sz="950" dirty="0"/>
           </a:p>
@@ -8672,7 +8672,7 @@
                 <a:ea typeface="微软雅黑" pitchFamily="34" charset="-122"/>
                 <a:cs typeface="微软雅黑" pitchFamily="34" charset="-120"/>
               </a:rPr>
-              <a:t>这句话直接对应 v4 界面底部的 notice 元素。</a:t>
+              <a:t>这句话直接对应单文件版界面底部的 notice 元素。</a:t>
             </a:r>
             <a:endParaRPr lang="en-US" sz="950" dirty="0"/>
           </a:p>
@@ -9364,7 +9364,7 @@
                 <a:ea typeface="微软雅黑" pitchFamily="34" charset="-122"/>
                 <a:cs typeface="微软雅黑" pitchFamily="34" charset="-120"/>
               </a:rPr>
-              <a:t>单文件 v4（1.53 MB）</a:t>
+              <a:t>单文件版（1.53 MB）</a:t>
             </a:r>
             <a:endParaRPr lang="en-US" sz="900" dirty="0"/>
           </a:p>

--- a/参赛材料/振动AI实验助手-汇报PPT-v3.pptx
+++ b/参赛材料/振动AI实验助手-汇报PPT-v3.pptx
@@ -7742,7 +7742,7 @@
                 <a:ea typeface="微软雅黑" pitchFamily="34" charset="-122"/>
                 <a:cs typeface="微软雅黑" pitchFamily="34" charset="-120"/>
               </a:rPr>
-              <a:t>界面为 振动AI实验助手.html 本机实际运行截图。</a:t>
+              <a:t>界面为 03_可运行Demo/振动AI实验助手-单文件v4.html 本机实际运行截图。</a:t>
             </a:r>
             <a:endParaRPr lang="en-US" sz="950" dirty="0"/>
           </a:p>
@@ -8672,7 +8672,7 @@
                 <a:ea typeface="微软雅黑" pitchFamily="34" charset="-122"/>
                 <a:cs typeface="微软雅黑" pitchFamily="34" charset="-120"/>
               </a:rPr>
-              <a:t>这句话直接对应单文件版界面底部的 notice 元素。</a:t>
+              <a:t>这句话直接对应 v4 界面底部的 notice 元素。</a:t>
             </a:r>
             <a:endParaRPr lang="en-US" sz="950" dirty="0"/>
           </a:p>
@@ -9364,7 +9364,7 @@
                 <a:ea typeface="微软雅黑" pitchFamily="34" charset="-122"/>
                 <a:cs typeface="微软雅黑" pitchFamily="34" charset="-120"/>
               </a:rPr>
-              <a:t>单文件版（1.53 MB）</a:t>
+              <a:t>单文件 v4（1.53 MB）</a:t>
             </a:r>
             <a:endParaRPr lang="en-US" sz="900" dirty="0"/>
           </a:p>
